--- a/data/GlobalMart_Presentation.pptx
+++ b/data/GlobalMart_Presentation.pptx
@@ -11463,7 +11463,7 @@
           <a:p>
             <a:fld id="{5BCAD085-E8A6-8845-BD4E-CB4CCA059FC4}" type="datetimeFigureOut">
               <a:rPr lang="en-US" smtClean="0"/>
-              <a:t>7/23/2026</a:t>
+              <a:t>7/24/2026</a:t>
             </a:fld>
             <a:endParaRPr lang="en-US"/>
           </a:p>
@@ -11631,7 +11631,7 @@
           <a:p>
             <a:fld id="{5BCAD085-E8A6-8845-BD4E-CB4CCA059FC4}" type="datetimeFigureOut">
               <a:rPr lang="en-US" smtClean="0"/>
-              <a:t>7/23/2026</a:t>
+              <a:t>7/24/2026</a:t>
             </a:fld>
             <a:endParaRPr lang="en-US"/>
           </a:p>
@@ -11809,7 +11809,7 @@
           <a:p>
             <a:fld id="{5BCAD085-E8A6-8845-BD4E-CB4CCA059FC4}" type="datetimeFigureOut">
               <a:rPr lang="en-US" smtClean="0"/>
-              <a:t>7/23/2026</a:t>
+              <a:t>7/24/2026</a:t>
             </a:fld>
             <a:endParaRPr lang="en-US"/>
           </a:p>
@@ -11977,7 +11977,7 @@
           <a:p>
             <a:fld id="{5BCAD085-E8A6-8845-BD4E-CB4CCA059FC4}" type="datetimeFigureOut">
               <a:rPr lang="en-US" smtClean="0"/>
-              <a:t>7/23/2026</a:t>
+              <a:t>7/24/2026</a:t>
             </a:fld>
             <a:endParaRPr lang="en-US"/>
           </a:p>
@@ -12222,7 +12222,7 @@
           <a:p>
             <a:fld id="{5BCAD085-E8A6-8845-BD4E-CB4CCA059FC4}" type="datetimeFigureOut">
               <a:rPr lang="en-US" smtClean="0"/>
-              <a:t>7/23/2026</a:t>
+              <a:t>7/24/2026</a:t>
             </a:fld>
             <a:endParaRPr lang="en-US"/>
           </a:p>
@@ -12507,7 +12507,7 @@
           <a:p>
             <a:fld id="{5BCAD085-E8A6-8845-BD4E-CB4CCA059FC4}" type="datetimeFigureOut">
               <a:rPr lang="en-US" smtClean="0"/>
-              <a:t>7/23/2026</a:t>
+              <a:t>7/24/2026</a:t>
             </a:fld>
             <a:endParaRPr lang="en-US"/>
           </a:p>
@@ -12926,7 +12926,7 @@
           <a:p>
             <a:fld id="{5BCAD085-E8A6-8845-BD4E-CB4CCA059FC4}" type="datetimeFigureOut">
               <a:rPr lang="en-US" smtClean="0"/>
-              <a:t>7/23/2026</a:t>
+              <a:t>7/24/2026</a:t>
             </a:fld>
             <a:endParaRPr lang="en-US"/>
           </a:p>
@@ -13043,7 +13043,7 @@
           <a:p>
             <a:fld id="{5BCAD085-E8A6-8845-BD4E-CB4CCA059FC4}" type="datetimeFigureOut">
               <a:rPr lang="en-US" smtClean="0"/>
-              <a:t>7/23/2026</a:t>
+              <a:t>7/24/2026</a:t>
             </a:fld>
             <a:endParaRPr lang="en-US"/>
           </a:p>
@@ -13138,7 +13138,7 @@
           <a:p>
             <a:fld id="{5BCAD085-E8A6-8845-BD4E-CB4CCA059FC4}" type="datetimeFigureOut">
               <a:rPr lang="en-US" smtClean="0"/>
-              <a:t>7/23/2026</a:t>
+              <a:t>7/24/2026</a:t>
             </a:fld>
             <a:endParaRPr lang="en-US"/>
           </a:p>
@@ -13413,7 +13413,7 @@
           <a:p>
             <a:fld id="{5BCAD085-E8A6-8845-BD4E-CB4CCA059FC4}" type="datetimeFigureOut">
               <a:rPr lang="en-US" smtClean="0"/>
-              <a:t>7/23/2026</a:t>
+              <a:t>7/24/2026</a:t>
             </a:fld>
             <a:endParaRPr lang="en-US"/>
           </a:p>
@@ -13665,7 +13665,7 @@
           <a:p>
             <a:fld id="{5BCAD085-E8A6-8845-BD4E-CB4CCA059FC4}" type="datetimeFigureOut">
               <a:rPr lang="en-US" smtClean="0"/>
-              <a:t>7/23/2026</a:t>
+              <a:t>7/24/2026</a:t>
             </a:fld>
             <a:endParaRPr lang="en-US"/>
           </a:p>
@@ -13876,7 +13876,7 @@
           <a:p>
             <a:fld id="{5BCAD085-E8A6-8845-BD4E-CB4CCA059FC4}" type="datetimeFigureOut">
               <a:rPr lang="en-US" smtClean="0"/>
-              <a:t>7/23/2026</a:t>
+              <a:t>7/24/2026</a:t>
             </a:fld>
             <a:endParaRPr lang="en-US"/>
           </a:p>
@@ -18016,7 +18016,13 @@
       </p:sp>
       <p:pic>
         <p:nvPicPr>
-          <p:cNvPr id="4" name="Picture 3" descr="Screenshot 2026-07-23 230409.png"/>
+          <p:cNvPr id="10" name="Picture 9">
+            <a:extLst>
+              <a:ext uri="{FF2B5EF4-FFF2-40B4-BE49-F238E27FC236}">
+                <a16:creationId xmlns:a16="http://schemas.microsoft.com/office/drawing/2014/main" id="{4952F6D0-DE46-EF2D-0114-A72B2DC86831}"/>
+              </a:ext>
+            </a:extLst>
+          </p:cNvPr>
           <p:cNvPicPr>
             <a:picLocks noChangeAspect="1"/>
           </p:cNvPicPr>
@@ -18030,8 +18036,8 @@
         </p:blipFill>
         <p:spPr>
           <a:xfrm>
-            <a:off x="4932488" y="728456"/>
-            <a:ext cx="6859456" cy="4679286"/>
+            <a:off x="4751727" y="209630"/>
+            <a:ext cx="7247233" cy="6032339"/>
           </a:xfrm>
           <a:prstGeom prst="rect">
             <a:avLst/>
@@ -18986,7 +18992,13 @@
       </p:sp>
       <p:pic>
         <p:nvPicPr>
-          <p:cNvPr id="4" name="Picture 3" descr="Screenshot 2026-07-23 230409.png"/>
+          <p:cNvPr id="6" name="Picture 5">
+            <a:extLst>
+              <a:ext uri="{FF2B5EF4-FFF2-40B4-BE49-F238E27FC236}">
+                <a16:creationId xmlns:a16="http://schemas.microsoft.com/office/drawing/2014/main" id="{434A98AB-9DC9-FEC5-D754-8D90F2DF1585}"/>
+              </a:ext>
+            </a:extLst>
+          </p:cNvPr>
           <p:cNvPicPr>
             <a:picLocks noChangeAspect="1"/>
           </p:cNvPicPr>
@@ -19000,8 +19012,8 @@
         </p:blipFill>
         <p:spPr>
           <a:xfrm>
-            <a:off x="5119306" y="1465367"/>
-            <a:ext cx="6655098" cy="4264873"/>
+            <a:off x="4751727" y="633619"/>
+            <a:ext cx="6928576" cy="5220982"/>
           </a:xfrm>
           <a:prstGeom prst="rect">
             <a:avLst/>

--- a/data/GlobalMart_Presentation.pptx
+++ b/data/GlobalMart_Presentation.pptx
@@ -18524,7 +18524,13 @@
       </p:sp>
       <p:pic>
         <p:nvPicPr>
-          <p:cNvPr id="4" name="Picture 3" descr="Screenshot 2026-07-23 230450.png"/>
+          <p:cNvPr id="6" name="Picture 5">
+            <a:extLst>
+              <a:ext uri="{FF2B5EF4-FFF2-40B4-BE49-F238E27FC236}">
+                <a16:creationId xmlns:a16="http://schemas.microsoft.com/office/drawing/2014/main" id="{A5A6AB72-3BFF-0468-A4AD-0C31A6673D35}"/>
+              </a:ext>
+            </a:extLst>
+          </p:cNvPr>
           <p:cNvPicPr>
             <a:picLocks noChangeAspect="1"/>
           </p:cNvPicPr>
@@ -18538,8 +18544,8 @@
         </p:blipFill>
         <p:spPr>
           <a:xfrm>
-            <a:off x="4905946" y="978618"/>
-            <a:ext cx="7038700" cy="4101382"/>
+            <a:off x="4773136" y="633619"/>
+            <a:ext cx="7303929" cy="4966941"/>
           </a:xfrm>
           <a:prstGeom prst="rect">
             <a:avLst/>

--- a/data/GlobalMart_Presentation.pptx
+++ b/data/GlobalMart_Presentation.pptx
@@ -18956,7 +18956,7 @@
               <a:defRPr sz="1800"/>
             </a:pPr>
             <a:r>
-              <a:rPr lang="en-US" sz="1700"/>
+              <a:rPr lang="en-US" sz="1700" dirty="0"/>
               <a:t>• Stock levels exceed demand across categories.</a:t>
             </a:r>
           </a:p>
@@ -18973,7 +18973,7 @@
               <a:defRPr sz="1800"/>
             </a:pPr>
             <a:r>
-              <a:rPr lang="en-US" sz="1700"/>
+              <a:rPr lang="en-US" sz="1700" dirty="0"/>
               <a:t>• Health &amp; Beauty holds the highest stock.</a:t>
             </a:r>
           </a:p>
@@ -18990,9 +18990,50 @@
               <a:defRPr sz="1800"/>
             </a:pPr>
             <a:r>
-              <a:rPr lang="en-US" sz="1700"/>
+              <a:rPr lang="en-US" sz="1700" dirty="0"/>
               <a:t>• Highest damage rates: Health &amp; Beauty (2.68%), Electronics (2.60%), Home Appliances (2.57%).</a:t>
             </a:r>
+          </a:p>
+          <a:p>
+            <a:pPr defTabSz="914400">
+              <a:lnSpc>
+                <a:spcPct val="90000"/>
+              </a:lnSpc>
+              <a:spcAft>
+                <a:spcPts val="600"/>
+              </a:spcAft>
+              <a:defRPr sz="1800"/>
+            </a:pPr>
+            <a:r>
+              <a:rPr lang="en-US" sz="1700" dirty="0"/>
+              <a:t>• Delivery performance weakens around September.</a:t>
+            </a:r>
+          </a:p>
+          <a:p>
+            <a:pPr defTabSz="914400">
+              <a:lnSpc>
+                <a:spcPct val="90000"/>
+              </a:lnSpc>
+              <a:spcAft>
+                <a:spcPts val="600"/>
+              </a:spcAft>
+              <a:defRPr sz="1800"/>
+            </a:pPr>
+            <a:endParaRPr lang="en-US" sz="1700" dirty="0"/>
+          </a:p>
+          <a:p>
+            <a:pPr indent="-228600" defTabSz="914400">
+              <a:lnSpc>
+                <a:spcPct val="90000"/>
+              </a:lnSpc>
+              <a:spcAft>
+                <a:spcPts val="600"/>
+              </a:spcAft>
+              <a:buFont typeface="Arial" panose="020B0604020202020204" pitchFamily="34" charset="0"/>
+              <a:buChar char="•"/>
+              <a:defRPr sz="1800"/>
+            </a:pPr>
+            <a:endParaRPr lang="en-US" sz="1700" dirty="0"/>
           </a:p>
         </p:txBody>
       </p:sp>
@@ -19430,7 +19471,7 @@
               <a:defRPr sz="1800"/>
             </a:pPr>
             <a:r>
-              <a:rPr lang="en-US" sz="1700"/>
+              <a:rPr lang="en-US" sz="1700" dirty="0"/>
               <a:t>• Revenue peaks around July and November.</a:t>
             </a:r>
           </a:p>
@@ -19447,41 +19488,22 @@
               <a:defRPr sz="1800"/>
             </a:pPr>
             <a:r>
-              <a:rPr lang="en-US" sz="1700"/>
+              <a:rPr lang="en-US" sz="1700" dirty="0"/>
               <a:t>• East Africa contributes the highest regional revenue (~22%).</a:t>
             </a:r>
           </a:p>
           <a:p>
-            <a:pPr indent="-228600" defTabSz="914400">
+            <a:pPr defTabSz="914400">
               <a:lnSpc>
                 <a:spcPct val="90000"/>
               </a:lnSpc>
               <a:spcAft>
                 <a:spcPts val="600"/>
               </a:spcAft>
-              <a:buFont typeface="Arial" panose="020B0604020202020204" pitchFamily="34" charset="0"/>
-              <a:buChar char="•"/>
               <a:defRPr sz="1800"/>
             </a:pPr>
             <a:r>
-              <a:rPr lang="en-US" sz="1700"/>
-              <a:t>• Delivery performance weakens around September.</a:t>
-            </a:r>
-          </a:p>
-          <a:p>
-            <a:pPr indent="-228600" defTabSz="914400">
-              <a:lnSpc>
-                <a:spcPct val="90000"/>
-              </a:lnSpc>
-              <a:spcAft>
-                <a:spcPts val="600"/>
-              </a:spcAft>
-              <a:buFont typeface="Arial" panose="020B0604020202020204" pitchFamily="34" charset="0"/>
-              <a:buChar char="•"/>
-              <a:defRPr sz="1800"/>
-            </a:pPr>
-            <a:r>
-              <a:rPr lang="en-US" sz="1700"/>
+              <a:rPr lang="en-US" sz="1700" dirty="0"/>
               <a:t>• Profitability remains consistent across categories.</a:t>
             </a:r>
           </a:p>
@@ -19489,7 +19511,13 @@
       </p:sp>
       <p:pic>
         <p:nvPicPr>
-          <p:cNvPr id="4" name="Picture 3" descr="Screenshot 2026-07-23 230450.png"/>
+          <p:cNvPr id="6" name="Picture 5">
+            <a:extLst>
+              <a:ext uri="{FF2B5EF4-FFF2-40B4-BE49-F238E27FC236}">
+                <a16:creationId xmlns:a16="http://schemas.microsoft.com/office/drawing/2014/main" id="{5730C178-48F7-B16F-9A8E-8CA43223E85E}"/>
+              </a:ext>
+            </a:extLst>
+          </p:cNvPr>
           <p:cNvPicPr>
             <a:picLocks noChangeAspect="1"/>
           </p:cNvPicPr>
@@ -19503,8 +19531,8 @@
         </p:blipFill>
         <p:spPr>
           <a:xfrm>
-            <a:off x="4775586" y="1171300"/>
-            <a:ext cx="6998818" cy="4254140"/>
+            <a:off x="4751727" y="859349"/>
+            <a:ext cx="7238946" cy="4834502"/>
           </a:xfrm>
           <a:prstGeom prst="rect">
             <a:avLst/>

--- a/data/GlobalMart_Presentation.pptx
+++ b/data/GlobalMart_Presentation.pptx
@@ -17928,88 +17928,102 @@
           </a:bodyPr>
           <a:lstStyle/>
           <a:p>
-            <a:pPr indent="-228600" defTabSz="914400">
+            <a:pPr defTabSz="914400">
               <a:lnSpc>
                 <a:spcPct val="90000"/>
               </a:lnSpc>
               <a:spcAft>
                 <a:spcPts val="600"/>
               </a:spcAft>
-              <a:buFont typeface="Arial" panose="020B0604020202020204" pitchFamily="34" charset="0"/>
-              <a:buChar char="•"/>
               <a:defRPr sz="1800"/>
             </a:pPr>
             <a:r>
-              <a:rPr lang="en-US" sz="1700"/>
+              <a:rPr lang="en-US" sz="1700" dirty="0"/>
               <a:t>• On-Time Delivery Rate: 34.66%</a:t>
             </a:r>
           </a:p>
           <a:p>
-            <a:pPr indent="-228600" defTabSz="914400">
+            <a:pPr defTabSz="914400">
               <a:lnSpc>
                 <a:spcPct val="90000"/>
               </a:lnSpc>
               <a:spcAft>
                 <a:spcPts val="600"/>
               </a:spcAft>
-              <a:buFont typeface="Arial" panose="020B0604020202020204" pitchFamily="34" charset="0"/>
-              <a:buChar char="•"/>
               <a:defRPr sz="1800"/>
             </a:pPr>
             <a:r>
-              <a:rPr lang="en-US" sz="1700"/>
+              <a:rPr lang="en-US" sz="1700" dirty="0"/>
               <a:t>• Late Delivery Rate: 65.14%</a:t>
             </a:r>
           </a:p>
           <a:p>
-            <a:pPr indent="-228600" defTabSz="914400">
+            <a:pPr defTabSz="914400">
               <a:lnSpc>
                 <a:spcPct val="90000"/>
               </a:lnSpc>
               <a:spcAft>
                 <a:spcPts val="600"/>
               </a:spcAft>
-              <a:buFont typeface="Arial" panose="020B0604020202020204" pitchFamily="34" charset="0"/>
-              <a:buChar char="•"/>
               <a:defRPr sz="1800"/>
             </a:pPr>
             <a:r>
-              <a:rPr lang="en-US" sz="1700"/>
+              <a:rPr lang="en-US" sz="1700" dirty="0"/>
               <a:t>• Average Shipping Time: 10 Days</a:t>
             </a:r>
           </a:p>
           <a:p>
-            <a:pPr indent="-228600" defTabSz="914400">
+            <a:pPr defTabSz="914400">
               <a:lnSpc>
                 <a:spcPct val="90000"/>
               </a:lnSpc>
               <a:spcAft>
                 <a:spcPts val="600"/>
               </a:spcAft>
-              <a:buFont typeface="Arial" panose="020B0604020202020204" pitchFamily="34" charset="0"/>
-              <a:buChar char="•"/>
               <a:defRPr sz="1800"/>
             </a:pPr>
             <a:r>
-              <a:rPr lang="en-US" sz="1700"/>
+              <a:rPr lang="en-US" sz="1700" dirty="0"/>
               <a:t>• Standard shipping achieved highest on-time performance.</a:t>
             </a:r>
           </a:p>
           <a:p>
-            <a:pPr indent="-228600" defTabSz="914400">
+            <a:pPr defTabSz="914400">
               <a:lnSpc>
                 <a:spcPct val="90000"/>
               </a:lnSpc>
               <a:spcAft>
                 <a:spcPts val="600"/>
               </a:spcAft>
-              <a:buFont typeface="Arial" panose="020B0604020202020204" pitchFamily="34" charset="0"/>
-              <a:buChar char="•"/>
               <a:defRPr sz="1800"/>
             </a:pPr>
             <a:r>
-              <a:rPr lang="en-US" sz="1700"/>
-              <a:t>• Indoafrica Imports, Sahelgoods SA and Megasupply Inc recorded the highest late delivery rates.</a:t>
+              <a:rPr lang="en-US" sz="1700" dirty="0"/>
+              <a:t>• </a:t>
+            </a:r>
+            <a:r>
+              <a:rPr lang="en-US" sz="1700" dirty="0" err="1"/>
+              <a:t>Indoafrica</a:t>
+            </a:r>
+            <a:r>
+              <a:rPr lang="en-US" sz="1700" dirty="0"/>
+              <a:t> Imports, </a:t>
+            </a:r>
+            <a:r>
+              <a:rPr lang="en-US" sz="1700" dirty="0" err="1"/>
+              <a:t>Sahelgoods</a:t>
+            </a:r>
+            <a:r>
+              <a:rPr lang="en-US" sz="1700" dirty="0"/>
+              <a:t> SA and </a:t>
+            </a:r>
+            <a:r>
+              <a:rPr lang="en-US" sz="1700" dirty="0" err="1"/>
+              <a:t>Megasupply</a:t>
+            </a:r>
+            <a:r>
+              <a:rPr lang="en-US" sz="1700" dirty="0"/>
+              <a:t> Inc recorded the highest late delivery rates.</a:t>
             </a:r>
           </a:p>
         </p:txBody>
@@ -18436,88 +18450,86 @@
           </a:bodyPr>
           <a:lstStyle/>
           <a:p>
-            <a:pPr indent="-228600" defTabSz="914400">
+            <a:pPr defTabSz="914400">
               <a:lnSpc>
                 <a:spcPct val="90000"/>
               </a:lnSpc>
               <a:spcAft>
                 <a:spcPts val="600"/>
               </a:spcAft>
-              <a:buFont typeface="Arial" panose="020B0604020202020204" pitchFamily="34" charset="0"/>
-              <a:buChar char="•"/>
               <a:defRPr sz="1800"/>
             </a:pPr>
             <a:r>
-              <a:rPr lang="en-US" sz="1700"/>
+              <a:rPr lang="en-US" sz="1700" dirty="0"/>
               <a:t>• Revenue ≈ $684M</a:t>
             </a:r>
           </a:p>
           <a:p>
-            <a:pPr indent="-228600" defTabSz="914400">
+            <a:pPr defTabSz="914400">
               <a:lnSpc>
                 <a:spcPct val="90000"/>
               </a:lnSpc>
               <a:spcAft>
                 <a:spcPts val="600"/>
               </a:spcAft>
-              <a:buFont typeface="Arial" panose="020B0604020202020204" pitchFamily="34" charset="0"/>
-              <a:buChar char="•"/>
               <a:defRPr sz="1800"/>
             </a:pPr>
             <a:r>
-              <a:rPr lang="en-US" sz="1700"/>
+              <a:rPr lang="en-US" sz="1700" dirty="0"/>
               <a:t>• Profit ≈ $190.5M</a:t>
             </a:r>
           </a:p>
           <a:p>
-            <a:pPr indent="-228600" defTabSz="914400">
+            <a:pPr defTabSz="914400">
               <a:lnSpc>
                 <a:spcPct val="90000"/>
               </a:lnSpc>
               <a:spcAft>
                 <a:spcPts val="600"/>
               </a:spcAft>
-              <a:buFont typeface="Arial" panose="020B0604020202020204" pitchFamily="34" charset="0"/>
-              <a:buChar char="•"/>
               <a:defRPr sz="1800"/>
             </a:pPr>
             <a:r>
-              <a:rPr lang="en-US" sz="1700"/>
+              <a:rPr lang="en-US" sz="1700" dirty="0"/>
               <a:t>• Profit Margin: 27.83%</a:t>
             </a:r>
           </a:p>
           <a:p>
-            <a:pPr indent="-228600" defTabSz="914400">
+            <a:pPr defTabSz="914400">
               <a:lnSpc>
                 <a:spcPct val="90000"/>
               </a:lnSpc>
               <a:spcAft>
                 <a:spcPts val="600"/>
               </a:spcAft>
-              <a:buFont typeface="Arial" panose="020B0604020202020204" pitchFamily="34" charset="0"/>
-              <a:buChar char="•"/>
               <a:defRPr sz="1800"/>
             </a:pPr>
             <a:r>
-              <a:rPr lang="en-US" sz="1700"/>
+              <a:rPr lang="en-US" sz="1700" dirty="0"/>
               <a:t>• Health &amp; Beauty generated highest revenue and profit.</a:t>
             </a:r>
           </a:p>
           <a:p>
-            <a:pPr indent="-228600" defTabSz="914400">
+            <a:pPr defTabSz="914400">
               <a:lnSpc>
                 <a:spcPct val="90000"/>
               </a:lnSpc>
               <a:spcAft>
                 <a:spcPts val="600"/>
               </a:spcAft>
-              <a:buFont typeface="Arial" panose="020B0604020202020204" pitchFamily="34" charset="0"/>
-              <a:buChar char="•"/>
               <a:defRPr sz="1800"/>
             </a:pPr>
             <a:r>
-              <a:rPr lang="en-US" sz="1700"/>
-              <a:t>• Sunsource Ltd is the top profit-contributing supplier.</a:t>
+              <a:rPr lang="en-US" sz="1700" dirty="0"/>
+              <a:t>• </a:t>
+            </a:r>
+            <a:r>
+              <a:rPr lang="en-US" sz="1700" dirty="0" err="1"/>
+              <a:t>Sunsource</a:t>
+            </a:r>
+            <a:r>
+              <a:rPr lang="en-US" sz="1700" dirty="0"/>
+              <a:t> Ltd is the top profit-contributing supplier.</a:t>
             </a:r>
           </a:p>
         </p:txBody>
@@ -18944,15 +18956,13 @@
           </a:bodyPr>
           <a:lstStyle/>
           <a:p>
-            <a:pPr indent="-228600" defTabSz="914400">
+            <a:pPr defTabSz="914400">
               <a:lnSpc>
                 <a:spcPct val="90000"/>
               </a:lnSpc>
               <a:spcAft>
                 <a:spcPts val="600"/>
               </a:spcAft>
-              <a:buFont typeface="Arial" panose="020B0604020202020204" pitchFamily="34" charset="0"/>
-              <a:buChar char="•"/>
               <a:defRPr sz="1800"/>
             </a:pPr>
             <a:r>
@@ -18961,15 +18971,13 @@
             </a:r>
           </a:p>
           <a:p>
-            <a:pPr indent="-228600" defTabSz="914400">
+            <a:pPr defTabSz="914400">
               <a:lnSpc>
                 <a:spcPct val="90000"/>
               </a:lnSpc>
               <a:spcAft>
                 <a:spcPts val="600"/>
               </a:spcAft>
-              <a:buFont typeface="Arial" panose="020B0604020202020204" pitchFamily="34" charset="0"/>
-              <a:buChar char="•"/>
               <a:defRPr sz="1800"/>
             </a:pPr>
             <a:r>
@@ -18978,15 +18986,13 @@
             </a:r>
           </a:p>
           <a:p>
-            <a:pPr indent="-228600" defTabSz="914400">
+            <a:pPr defTabSz="914400">
               <a:lnSpc>
                 <a:spcPct val="90000"/>
               </a:lnSpc>
               <a:spcAft>
                 <a:spcPts val="600"/>
               </a:spcAft>
-              <a:buFont typeface="Arial" panose="020B0604020202020204" pitchFamily="34" charset="0"/>
-              <a:buChar char="•"/>
               <a:defRPr sz="1800"/>
             </a:pPr>
             <a:r>
@@ -19459,15 +19465,13 @@
           </a:bodyPr>
           <a:lstStyle/>
           <a:p>
-            <a:pPr indent="-228600" defTabSz="914400">
+            <a:pPr defTabSz="914400">
               <a:lnSpc>
                 <a:spcPct val="90000"/>
               </a:lnSpc>
               <a:spcAft>
                 <a:spcPts val="600"/>
               </a:spcAft>
-              <a:buFont typeface="Arial" panose="020B0604020202020204" pitchFamily="34" charset="0"/>
-              <a:buChar char="•"/>
               <a:defRPr sz="1800"/>
             </a:pPr>
             <a:r>
@@ -19476,15 +19480,13 @@
             </a:r>
           </a:p>
           <a:p>
-            <a:pPr indent="-228600" defTabSz="914400">
+            <a:pPr defTabSz="914400">
               <a:lnSpc>
                 <a:spcPct val="90000"/>
               </a:lnSpc>
               <a:spcAft>
                 <a:spcPts val="600"/>
               </a:spcAft>
-              <a:buFont typeface="Arial" panose="020B0604020202020204" pitchFamily="34" charset="0"/>
-              <a:buChar char="•"/>
               <a:defRPr sz="1800"/>
             </a:pPr>
             <a:r>
